--- a/examples/pm6_stylebase/stylebase_merged.pptx
+++ b/examples/pm6_stylebase/stylebase_merged.pptx
@@ -760,7 +760,7 @@
     </p:spTree>
     <p:extLst>
       <p:ext uri="{BB962C8B-B14F-4D97-AF65-F5344CB8AC3E}">
-        <p14:creationId xmlns:p14="http://schemas.microsoft.com/office/powerpoint/2010/main" val="2196916561"/>
+        <p14:creationId xmlns:p14="http://schemas.microsoft.com/office/powerpoint/2010/main" val="3233347307"/>
       </p:ext>
     </p:extLst>
   </p:cSld>
@@ -1007,7 +1007,7 @@
     </p:spTree>
     <p:extLst>
       <p:ext uri="{BB962C8B-B14F-4D97-AF65-F5344CB8AC3E}">
-        <p14:creationId xmlns:p14="http://schemas.microsoft.com/office/powerpoint/2010/main" val="3271077729"/>
+        <p14:creationId xmlns:p14="http://schemas.microsoft.com/office/powerpoint/2010/main" val="1377921895"/>
       </p:ext>
     </p:extLst>
   </p:cSld>
@@ -1231,7 +1231,7 @@
     </p:spTree>
     <p:extLst>
       <p:ext uri="{BB962C8B-B14F-4D97-AF65-F5344CB8AC3E}">
-        <p14:creationId xmlns:p14="http://schemas.microsoft.com/office/powerpoint/2010/main" val="2890192353"/>
+        <p14:creationId xmlns:p14="http://schemas.microsoft.com/office/powerpoint/2010/main" val="414299394"/>
       </p:ext>
     </p:extLst>
   </p:cSld>
@@ -1455,7 +1455,7 @@
     </p:spTree>
     <p:extLst>
       <p:ext uri="{BB962C8B-B14F-4D97-AF65-F5344CB8AC3E}">
-        <p14:creationId xmlns:p14="http://schemas.microsoft.com/office/powerpoint/2010/main" val="3906789248"/>
+        <p14:creationId xmlns:p14="http://schemas.microsoft.com/office/powerpoint/2010/main" val="251786051"/>
       </p:ext>
     </p:extLst>
   </p:cSld>
@@ -1649,7 +1649,7 @@
     </p:spTree>
     <p:extLst>
       <p:ext uri="{BB962C8B-B14F-4D97-AF65-F5344CB8AC3E}">
-        <p14:creationId xmlns:p14="http://schemas.microsoft.com/office/powerpoint/2010/main" val="3079465864"/>
+        <p14:creationId xmlns:p14="http://schemas.microsoft.com/office/powerpoint/2010/main" val="159813824"/>
       </p:ext>
     </p:extLst>
   </p:cSld>
@@ -5142,7 +5142,7 @@
     </p:spTree>
     <p:extLst>
       <p:ext uri="{BB962C8B-B14F-4D97-AF65-F5344CB8AC3E}">
-        <p14:creationId xmlns:p14="http://schemas.microsoft.com/office/powerpoint/2010/main" val="3784180336"/>
+        <p14:creationId xmlns:p14="http://schemas.microsoft.com/office/powerpoint/2010/main" val="613227140"/>
       </p:ext>
     </p:extLst>
   </p:cSld>
@@ -7069,7 +7069,7 @@
     </p:spTree>
     <p:extLst>
       <p:ext uri="{BB962C8B-B14F-4D97-AF65-F5344CB8AC3E}">
-        <p14:creationId xmlns:p14="http://schemas.microsoft.com/office/powerpoint/2010/main" val="2047184490"/>
+        <p14:creationId xmlns:p14="http://schemas.microsoft.com/office/powerpoint/2010/main" val="213746589"/>
       </p:ext>
     </p:extLst>
   </p:cSld>
@@ -9514,7 +9514,7 @@
     </p:spTree>
     <p:extLst>
       <p:ext uri="{BB962C8B-B14F-4D97-AF65-F5344CB8AC3E}">
-        <p14:creationId xmlns:p14="http://schemas.microsoft.com/office/powerpoint/2010/main" val="4271957309"/>
+        <p14:creationId xmlns:p14="http://schemas.microsoft.com/office/powerpoint/2010/main" val="231573025"/>
       </p:ext>
     </p:extLst>
   </p:cSld>
@@ -10243,7 +10243,7 @@
     </p:spTree>
     <p:extLst>
       <p:ext uri="{BB962C8B-B14F-4D97-AF65-F5344CB8AC3E}">
-        <p14:creationId xmlns:p14="http://schemas.microsoft.com/office/powerpoint/2010/main" val="3179564809"/>
+        <p14:creationId xmlns:p14="http://schemas.microsoft.com/office/powerpoint/2010/main" val="2260665639"/>
       </p:ext>
     </p:extLst>
   </p:cSld>
@@ -11056,7 +11056,7 @@
     </p:spTree>
     <p:extLst>
       <p:ext uri="{BB962C8B-B14F-4D97-AF65-F5344CB8AC3E}">
-        <p14:creationId xmlns:p14="http://schemas.microsoft.com/office/powerpoint/2010/main" val="996449222"/>
+        <p14:creationId xmlns:p14="http://schemas.microsoft.com/office/powerpoint/2010/main" val="728024801"/>
       </p:ext>
     </p:extLst>
   </p:cSld>

--- a/examples/pm6_stylebase/stylebase_merged.pptx
+++ b/examples/pm6_stylebase/stylebase_merged.pptx
@@ -242,7 +242,7 @@
           <a:p>
             <a:fld id="{294670BC-B8C6-44A7-84E1-23632D8FD86F}" type="datetimeFigureOut">
               <a:rPr kumimoji="1" lang="ja-JP" altLang="en-US" smtClean="0"/>
-              <a:t>2026/6/4</a:t>
+              <a:t>2026/6/6</a:t>
             </a:fld>
             <a:endParaRPr kumimoji="1" lang="ja-JP" altLang="en-US"/>
           </a:p>
@@ -760,7 +760,7 @@
     </p:spTree>
     <p:extLst>
       <p:ext uri="{BB962C8B-B14F-4D97-AF65-F5344CB8AC3E}">
-        <p14:creationId xmlns:p14="http://schemas.microsoft.com/office/powerpoint/2010/main" val="3233347307"/>
+        <p14:creationId xmlns:p14="http://schemas.microsoft.com/office/powerpoint/2010/main" val="397400069"/>
       </p:ext>
     </p:extLst>
   </p:cSld>
@@ -1007,7 +1007,7 @@
     </p:spTree>
     <p:extLst>
       <p:ext uri="{BB962C8B-B14F-4D97-AF65-F5344CB8AC3E}">
-        <p14:creationId xmlns:p14="http://schemas.microsoft.com/office/powerpoint/2010/main" val="1377921895"/>
+        <p14:creationId xmlns:p14="http://schemas.microsoft.com/office/powerpoint/2010/main" val="3801638673"/>
       </p:ext>
     </p:extLst>
   </p:cSld>
@@ -1231,7 +1231,7 @@
     </p:spTree>
     <p:extLst>
       <p:ext uri="{BB962C8B-B14F-4D97-AF65-F5344CB8AC3E}">
-        <p14:creationId xmlns:p14="http://schemas.microsoft.com/office/powerpoint/2010/main" val="414299394"/>
+        <p14:creationId xmlns:p14="http://schemas.microsoft.com/office/powerpoint/2010/main" val="2404647344"/>
       </p:ext>
     </p:extLst>
   </p:cSld>
@@ -1455,7 +1455,7 @@
     </p:spTree>
     <p:extLst>
       <p:ext uri="{BB962C8B-B14F-4D97-AF65-F5344CB8AC3E}">
-        <p14:creationId xmlns:p14="http://schemas.microsoft.com/office/powerpoint/2010/main" val="251786051"/>
+        <p14:creationId xmlns:p14="http://schemas.microsoft.com/office/powerpoint/2010/main" val="3410804335"/>
       </p:ext>
     </p:extLst>
   </p:cSld>
@@ -1649,7 +1649,7 @@
     </p:spTree>
     <p:extLst>
       <p:ext uri="{BB962C8B-B14F-4D97-AF65-F5344CB8AC3E}">
-        <p14:creationId xmlns:p14="http://schemas.microsoft.com/office/powerpoint/2010/main" val="159813824"/>
+        <p14:creationId xmlns:p14="http://schemas.microsoft.com/office/powerpoint/2010/main" val="3858593558"/>
       </p:ext>
     </p:extLst>
   </p:cSld>
@@ -5142,7 +5142,7 @@
     </p:spTree>
     <p:extLst>
       <p:ext uri="{BB962C8B-B14F-4D97-AF65-F5344CB8AC3E}">
-        <p14:creationId xmlns:p14="http://schemas.microsoft.com/office/powerpoint/2010/main" val="613227140"/>
+        <p14:creationId xmlns:p14="http://schemas.microsoft.com/office/powerpoint/2010/main" val="2100758759"/>
       </p:ext>
     </p:extLst>
   </p:cSld>
@@ -7069,7 +7069,7 @@
     </p:spTree>
     <p:extLst>
       <p:ext uri="{BB962C8B-B14F-4D97-AF65-F5344CB8AC3E}">
-        <p14:creationId xmlns:p14="http://schemas.microsoft.com/office/powerpoint/2010/main" val="213746589"/>
+        <p14:creationId xmlns:p14="http://schemas.microsoft.com/office/powerpoint/2010/main" val="620094966"/>
       </p:ext>
     </p:extLst>
   </p:cSld>
@@ -9514,7 +9514,7 @@
     </p:spTree>
     <p:extLst>
       <p:ext uri="{BB962C8B-B14F-4D97-AF65-F5344CB8AC3E}">
-        <p14:creationId xmlns:p14="http://schemas.microsoft.com/office/powerpoint/2010/main" val="231573025"/>
+        <p14:creationId xmlns:p14="http://schemas.microsoft.com/office/powerpoint/2010/main" val="2783495247"/>
       </p:ext>
     </p:extLst>
   </p:cSld>
@@ -10243,7 +10243,7 @@
     </p:spTree>
     <p:extLst>
       <p:ext uri="{BB962C8B-B14F-4D97-AF65-F5344CB8AC3E}">
-        <p14:creationId xmlns:p14="http://schemas.microsoft.com/office/powerpoint/2010/main" val="2260665639"/>
+        <p14:creationId xmlns:p14="http://schemas.microsoft.com/office/powerpoint/2010/main" val="2884919504"/>
       </p:ext>
     </p:extLst>
   </p:cSld>
@@ -11056,7 +11056,7 @@
     </p:spTree>
     <p:extLst>
       <p:ext uri="{BB962C8B-B14F-4D97-AF65-F5344CB8AC3E}">
-        <p14:creationId xmlns:p14="http://schemas.microsoft.com/office/powerpoint/2010/main" val="728024801"/>
+        <p14:creationId xmlns:p14="http://schemas.microsoft.com/office/powerpoint/2010/main" val="3013083795"/>
       </p:ext>
     </p:extLst>
   </p:cSld>
